--- a/ゲーム科2年/00_前期/ゲーム開発Ⅰ/00_3Dモデルの作成と出力.pptx
+++ b/ゲーム科2年/00_前期/ゲーム開発Ⅰ/00_3Dモデルの作成と出力.pptx
@@ -268,7 +268,7 @@
           <a:p>
             <a:fld id="{E9CC885B-4903-4D54-9A93-00025F12DED9}" type="datetimeFigureOut">
               <a:rPr kumimoji="1" lang="ja-JP" altLang="en-US" smtClean="0"/>
-              <a:t>2024/9/30</a:t>
+              <a:t>2025/1/6</a:t>
             </a:fld>
             <a:endParaRPr kumimoji="1" lang="ja-JP" altLang="en-US"/>
           </a:p>
@@ -498,7 +498,7 @@
           <a:p>
             <a:fld id="{E9CC885B-4903-4D54-9A93-00025F12DED9}" type="datetimeFigureOut">
               <a:rPr kumimoji="1" lang="ja-JP" altLang="en-US" smtClean="0"/>
-              <a:t>2024/9/30</a:t>
+              <a:t>2025/1/6</a:t>
             </a:fld>
             <a:endParaRPr kumimoji="1" lang="ja-JP" altLang="en-US"/>
           </a:p>
@@ -738,7 +738,7 @@
           <a:p>
             <a:fld id="{E9CC885B-4903-4D54-9A93-00025F12DED9}" type="datetimeFigureOut">
               <a:rPr kumimoji="1" lang="ja-JP" altLang="en-US" smtClean="0"/>
-              <a:t>2024/9/30</a:t>
+              <a:t>2025/1/6</a:t>
             </a:fld>
             <a:endParaRPr kumimoji="1" lang="ja-JP" altLang="en-US"/>
           </a:p>
@@ -968,7 +968,7 @@
           <a:p>
             <a:fld id="{E9CC885B-4903-4D54-9A93-00025F12DED9}" type="datetimeFigureOut">
               <a:rPr kumimoji="1" lang="ja-JP" altLang="en-US" smtClean="0"/>
-              <a:t>2024/9/30</a:t>
+              <a:t>2025/1/6</a:t>
             </a:fld>
             <a:endParaRPr kumimoji="1" lang="ja-JP" altLang="en-US"/>
           </a:p>
@@ -1243,7 +1243,7 @@
           <a:p>
             <a:fld id="{E9CC885B-4903-4D54-9A93-00025F12DED9}" type="datetimeFigureOut">
               <a:rPr kumimoji="1" lang="ja-JP" altLang="en-US" smtClean="0"/>
-              <a:t>2024/9/30</a:t>
+              <a:t>2025/1/6</a:t>
             </a:fld>
             <a:endParaRPr kumimoji="1" lang="ja-JP" altLang="en-US"/>
           </a:p>
@@ -1572,7 +1572,7 @@
           <a:p>
             <a:fld id="{E9CC885B-4903-4D54-9A93-00025F12DED9}" type="datetimeFigureOut">
               <a:rPr kumimoji="1" lang="ja-JP" altLang="en-US" smtClean="0"/>
-              <a:t>2024/9/30</a:t>
+              <a:t>2025/1/6</a:t>
             </a:fld>
             <a:endParaRPr kumimoji="1" lang="ja-JP" altLang="en-US"/>
           </a:p>
@@ -2048,7 +2048,7 @@
           <a:p>
             <a:fld id="{E9CC885B-4903-4D54-9A93-00025F12DED9}" type="datetimeFigureOut">
               <a:rPr kumimoji="1" lang="ja-JP" altLang="en-US" smtClean="0"/>
-              <a:t>2024/9/30</a:t>
+              <a:t>2025/1/6</a:t>
             </a:fld>
             <a:endParaRPr kumimoji="1" lang="ja-JP" altLang="en-US"/>
           </a:p>
@@ -2189,7 +2189,7 @@
           <a:p>
             <a:fld id="{E9CC885B-4903-4D54-9A93-00025F12DED9}" type="datetimeFigureOut">
               <a:rPr kumimoji="1" lang="ja-JP" altLang="en-US" smtClean="0"/>
-              <a:t>2024/9/30</a:t>
+              <a:t>2025/1/6</a:t>
             </a:fld>
             <a:endParaRPr kumimoji="1" lang="ja-JP" altLang="en-US"/>
           </a:p>
@@ -2302,7 +2302,7 @@
           <a:p>
             <a:fld id="{E9CC885B-4903-4D54-9A93-00025F12DED9}" type="datetimeFigureOut">
               <a:rPr kumimoji="1" lang="ja-JP" altLang="en-US" smtClean="0"/>
-              <a:t>2024/9/30</a:t>
+              <a:t>2025/1/6</a:t>
             </a:fld>
             <a:endParaRPr kumimoji="1" lang="ja-JP" altLang="en-US"/>
           </a:p>
@@ -2645,7 +2645,7 @@
           <a:p>
             <a:fld id="{E9CC885B-4903-4D54-9A93-00025F12DED9}" type="datetimeFigureOut">
               <a:rPr kumimoji="1" lang="ja-JP" altLang="en-US" smtClean="0"/>
-              <a:t>2024/9/30</a:t>
+              <a:t>2025/1/6</a:t>
             </a:fld>
             <a:endParaRPr kumimoji="1" lang="ja-JP" altLang="en-US"/>
           </a:p>
@@ -2933,7 +2933,7 @@
           <a:p>
             <a:fld id="{E9CC885B-4903-4D54-9A93-00025F12DED9}" type="datetimeFigureOut">
               <a:rPr kumimoji="1" lang="ja-JP" altLang="en-US" smtClean="0"/>
-              <a:t>2024/9/30</a:t>
+              <a:t>2025/1/6</a:t>
             </a:fld>
             <a:endParaRPr kumimoji="1" lang="ja-JP" altLang="en-US"/>
           </a:p>
@@ -3206,7 +3206,7 @@
           <a:p>
             <a:fld id="{E9CC885B-4903-4D54-9A93-00025F12DED9}" type="datetimeFigureOut">
               <a:rPr kumimoji="1" lang="ja-JP" altLang="en-US" smtClean="0"/>
-              <a:t>2024/9/30</a:t>
+              <a:t>2025/1/6</a:t>
             </a:fld>
             <a:endParaRPr kumimoji="1" lang="ja-JP" altLang="en-US"/>
           </a:p>
@@ -4725,7 +4725,7 @@
                   <a:srgbClr val="FF0000"/>
                 </a:solidFill>
               </a:rPr>
-              <a:t>FBX All</a:t>
+              <a:t>FBX Units Scale</a:t>
             </a:r>
             <a:r>
               <a:rPr kumimoji="1" lang="ja-JP" altLang="en-US" sz="2400" b="1" dirty="0">
@@ -4743,12 +4743,56 @@
           </a:p>
         </p:txBody>
       </p:sp>
+      <p:sp>
+        <p:nvSpPr>
+          <p:cNvPr id="9" name="テキスト ボックス 8">
+            <a:extLst>
+              <a:ext uri="{FF2B5EF4-FFF2-40B4-BE49-F238E27FC236}">
+                <a16:creationId xmlns:a16="http://schemas.microsoft.com/office/drawing/2014/main" id="{195A4FFA-B6D4-48E4-A135-A36FA0DA78C3}"/>
+              </a:ext>
+            </a:extLst>
+          </p:cNvPr>
+          <p:cNvSpPr txBox="1"/>
+          <p:nvPr/>
+        </p:nvSpPr>
+        <p:spPr>
+          <a:xfrm>
+            <a:off x="567542" y="5514526"/>
+            <a:ext cx="5715026" cy="461665"/>
+          </a:xfrm>
+          <a:prstGeom prst="rect">
+            <a:avLst/>
+          </a:prstGeom>
+          <a:noFill/>
+        </p:spPr>
+        <p:txBody>
+          <a:bodyPr wrap="none" rtlCol="0">
+            <a:spAutoFit/>
+          </a:bodyPr>
+          <a:lstStyle/>
+          <a:p>
+            <a:r>
+              <a:rPr kumimoji="1" lang="ja-JP" altLang="en-US" sz="2400" dirty="0"/>
+              <a:t>ここまで設定したら</a:t>
+            </a:r>
+            <a:r>
+              <a:rPr kumimoji="1" lang="en-US" altLang="ja-JP" sz="2400" dirty="0"/>
+              <a:t>Export</a:t>
+            </a:r>
+            <a:r>
+              <a:rPr kumimoji="1" lang="ja-JP" altLang="en-US" sz="2400" dirty="0"/>
+              <a:t>しましょう！</a:t>
+            </a:r>
+            <a:endParaRPr kumimoji="1" lang="en-US" altLang="ja-JP" sz="2400" dirty="0"/>
+          </a:p>
+        </p:txBody>
+      </p:sp>
       <p:pic>
         <p:nvPicPr>
-          <p:cNvPr id="3" name="図 2">
-            <a:extLst>
-              <a:ext uri="{FF2B5EF4-FFF2-40B4-BE49-F238E27FC236}">
-                <a16:creationId xmlns:a16="http://schemas.microsoft.com/office/drawing/2014/main" id="{079BC577-040D-4E99-93D4-3FCDA5A4BB7C}"/>
+          <p:cNvPr id="5" name="図 4">
+            <a:extLst>
+              <a:ext uri="{FF2B5EF4-FFF2-40B4-BE49-F238E27FC236}">
+                <a16:creationId xmlns:a16="http://schemas.microsoft.com/office/drawing/2014/main" id="{7AC0A771-27A0-4480-B9D9-8526FFBA9DEA}"/>
               </a:ext>
             </a:extLst>
           </p:cNvPr>
@@ -4758,21 +4802,15 @@
           <p:nvPr/>
         </p:nvPicPr>
         <p:blipFill>
-          <a:blip r:embed="rId2">
-            <a:extLst>
-              <a:ext uri="{28A0092B-C50C-407E-A947-70E740481C1C}">
-                <a14:useLocalDpi xmlns:a14="http://schemas.microsoft.com/office/drawing/2010/main" val="0"/>
-              </a:ext>
-            </a:extLst>
-          </a:blip>
+          <a:blip r:embed="rId2"/>
           <a:stretch>
             <a:fillRect/>
           </a:stretch>
         </p:blipFill>
         <p:spPr>
           <a:xfrm>
-            <a:off x="567542" y="2187126"/>
-            <a:ext cx="3644344" cy="3184974"/>
+            <a:off x="567541" y="2187126"/>
+            <a:ext cx="3665597" cy="3062207"/>
           </a:xfrm>
           <a:prstGeom prst="rect">
             <a:avLst/>
@@ -4781,10 +4819,10 @@
       </p:pic>
       <p:sp>
         <p:nvSpPr>
-          <p:cNvPr id="8" name="矢印: 右 7">
-            <a:extLst>
-              <a:ext uri="{FF2B5EF4-FFF2-40B4-BE49-F238E27FC236}">
-                <a16:creationId xmlns:a16="http://schemas.microsoft.com/office/drawing/2014/main" id="{3775C345-DF2D-4E8B-A3A2-BF3D60A00480}"/>
+          <p:cNvPr id="10" name="矢印: 右 9">
+            <a:extLst>
+              <a:ext uri="{FF2B5EF4-FFF2-40B4-BE49-F238E27FC236}">
+                <a16:creationId xmlns:a16="http://schemas.microsoft.com/office/drawing/2014/main" id="{CFAE88F2-19A9-40AB-B18B-5B214427BAB9}"/>
               </a:ext>
             </a:extLst>
           </p:cNvPr>
@@ -4793,7 +4831,7 @@
         </p:nvSpPr>
         <p:spPr>
           <a:xfrm rot="13679340">
-            <a:off x="2820580" y="3246091"/>
+            <a:off x="3358500" y="3271491"/>
             <a:ext cx="817913" cy="711200"/>
           </a:xfrm>
           <a:prstGeom prst="rightArrow">
@@ -4830,50 +4868,6 @@
           <a:p>
             <a:pPr algn="ctr"/>
             <a:endParaRPr kumimoji="1" lang="ja-JP" altLang="en-US"/>
-          </a:p>
-        </p:txBody>
-      </p:sp>
-      <p:sp>
-        <p:nvSpPr>
-          <p:cNvPr id="9" name="テキスト ボックス 8">
-            <a:extLst>
-              <a:ext uri="{FF2B5EF4-FFF2-40B4-BE49-F238E27FC236}">
-                <a16:creationId xmlns:a16="http://schemas.microsoft.com/office/drawing/2014/main" id="{195A4FFA-B6D4-48E4-A135-A36FA0DA78C3}"/>
-              </a:ext>
-            </a:extLst>
-          </p:cNvPr>
-          <p:cNvSpPr txBox="1"/>
-          <p:nvPr/>
-        </p:nvSpPr>
-        <p:spPr>
-          <a:xfrm>
-            <a:off x="567542" y="5514526"/>
-            <a:ext cx="5715026" cy="461665"/>
-          </a:xfrm>
-          <a:prstGeom prst="rect">
-            <a:avLst/>
-          </a:prstGeom>
-          <a:noFill/>
-        </p:spPr>
-        <p:txBody>
-          <a:bodyPr wrap="none" rtlCol="0">
-            <a:spAutoFit/>
-          </a:bodyPr>
-          <a:lstStyle/>
-          <a:p>
-            <a:r>
-              <a:rPr kumimoji="1" lang="ja-JP" altLang="en-US" sz="2400" dirty="0"/>
-              <a:t>ここまで設定したら</a:t>
-            </a:r>
-            <a:r>
-              <a:rPr kumimoji="1" lang="en-US" altLang="ja-JP" sz="2400" dirty="0"/>
-              <a:t>Export</a:t>
-            </a:r>
-            <a:r>
-              <a:rPr kumimoji="1" lang="ja-JP" altLang="en-US" sz="2400" dirty="0"/>
-              <a:t>しましょう！</a:t>
-            </a:r>
-            <a:endParaRPr kumimoji="1" lang="en-US" altLang="ja-JP" sz="2400" dirty="0"/>
           </a:p>
         </p:txBody>
       </p:sp>

--- a/ゲーム科2年/00_前期/ゲーム開発Ⅰ/00_3Dモデルの作成と出力.pptx
+++ b/ゲーム科2年/00_前期/ゲーム開発Ⅰ/00_3Dモデルの作成と出力.pptx
@@ -268,7 +268,7 @@
           <a:p>
             <a:fld id="{E9CC885B-4903-4D54-9A93-00025F12DED9}" type="datetimeFigureOut">
               <a:rPr kumimoji="1" lang="ja-JP" altLang="en-US" smtClean="0"/>
-              <a:t>2025/1/6</a:t>
+              <a:t>2025/2/7</a:t>
             </a:fld>
             <a:endParaRPr kumimoji="1" lang="ja-JP" altLang="en-US"/>
           </a:p>
@@ -498,7 +498,7 @@
           <a:p>
             <a:fld id="{E9CC885B-4903-4D54-9A93-00025F12DED9}" type="datetimeFigureOut">
               <a:rPr kumimoji="1" lang="ja-JP" altLang="en-US" smtClean="0"/>
-              <a:t>2025/1/6</a:t>
+              <a:t>2025/2/7</a:t>
             </a:fld>
             <a:endParaRPr kumimoji="1" lang="ja-JP" altLang="en-US"/>
           </a:p>
@@ -738,7 +738,7 @@
           <a:p>
             <a:fld id="{E9CC885B-4903-4D54-9A93-00025F12DED9}" type="datetimeFigureOut">
               <a:rPr kumimoji="1" lang="ja-JP" altLang="en-US" smtClean="0"/>
-              <a:t>2025/1/6</a:t>
+              <a:t>2025/2/7</a:t>
             </a:fld>
             <a:endParaRPr kumimoji="1" lang="ja-JP" altLang="en-US"/>
           </a:p>
@@ -968,7 +968,7 @@
           <a:p>
             <a:fld id="{E9CC885B-4903-4D54-9A93-00025F12DED9}" type="datetimeFigureOut">
               <a:rPr kumimoji="1" lang="ja-JP" altLang="en-US" smtClean="0"/>
-              <a:t>2025/1/6</a:t>
+              <a:t>2025/2/7</a:t>
             </a:fld>
             <a:endParaRPr kumimoji="1" lang="ja-JP" altLang="en-US"/>
           </a:p>
@@ -1243,7 +1243,7 @@
           <a:p>
             <a:fld id="{E9CC885B-4903-4D54-9A93-00025F12DED9}" type="datetimeFigureOut">
               <a:rPr kumimoji="1" lang="ja-JP" altLang="en-US" smtClean="0"/>
-              <a:t>2025/1/6</a:t>
+              <a:t>2025/2/7</a:t>
             </a:fld>
             <a:endParaRPr kumimoji="1" lang="ja-JP" altLang="en-US"/>
           </a:p>
@@ -1572,7 +1572,7 @@
           <a:p>
             <a:fld id="{E9CC885B-4903-4D54-9A93-00025F12DED9}" type="datetimeFigureOut">
               <a:rPr kumimoji="1" lang="ja-JP" altLang="en-US" smtClean="0"/>
-              <a:t>2025/1/6</a:t>
+              <a:t>2025/2/7</a:t>
             </a:fld>
             <a:endParaRPr kumimoji="1" lang="ja-JP" altLang="en-US"/>
           </a:p>
@@ -2048,7 +2048,7 @@
           <a:p>
             <a:fld id="{E9CC885B-4903-4D54-9A93-00025F12DED9}" type="datetimeFigureOut">
               <a:rPr kumimoji="1" lang="ja-JP" altLang="en-US" smtClean="0"/>
-              <a:t>2025/1/6</a:t>
+              <a:t>2025/2/7</a:t>
             </a:fld>
             <a:endParaRPr kumimoji="1" lang="ja-JP" altLang="en-US"/>
           </a:p>
@@ -2189,7 +2189,7 @@
           <a:p>
             <a:fld id="{E9CC885B-4903-4D54-9A93-00025F12DED9}" type="datetimeFigureOut">
               <a:rPr kumimoji="1" lang="ja-JP" altLang="en-US" smtClean="0"/>
-              <a:t>2025/1/6</a:t>
+              <a:t>2025/2/7</a:t>
             </a:fld>
             <a:endParaRPr kumimoji="1" lang="ja-JP" altLang="en-US"/>
           </a:p>
@@ -2302,7 +2302,7 @@
           <a:p>
             <a:fld id="{E9CC885B-4903-4D54-9A93-00025F12DED9}" type="datetimeFigureOut">
               <a:rPr kumimoji="1" lang="ja-JP" altLang="en-US" smtClean="0"/>
-              <a:t>2025/1/6</a:t>
+              <a:t>2025/2/7</a:t>
             </a:fld>
             <a:endParaRPr kumimoji="1" lang="ja-JP" altLang="en-US"/>
           </a:p>
@@ -2645,7 +2645,7 @@
           <a:p>
             <a:fld id="{E9CC885B-4903-4D54-9A93-00025F12DED9}" type="datetimeFigureOut">
               <a:rPr kumimoji="1" lang="ja-JP" altLang="en-US" smtClean="0"/>
-              <a:t>2025/1/6</a:t>
+              <a:t>2025/2/7</a:t>
             </a:fld>
             <a:endParaRPr kumimoji="1" lang="ja-JP" altLang="en-US"/>
           </a:p>
@@ -2933,7 +2933,7 @@
           <a:p>
             <a:fld id="{E9CC885B-4903-4D54-9A93-00025F12DED9}" type="datetimeFigureOut">
               <a:rPr kumimoji="1" lang="ja-JP" altLang="en-US" smtClean="0"/>
-              <a:t>2025/1/6</a:t>
+              <a:t>2025/2/7</a:t>
             </a:fld>
             <a:endParaRPr kumimoji="1" lang="ja-JP" altLang="en-US"/>
           </a:p>
@@ -3206,7 +3206,7 @@
           <a:p>
             <a:fld id="{E9CC885B-4903-4D54-9A93-00025F12DED9}" type="datetimeFigureOut">
               <a:rPr kumimoji="1" lang="ja-JP" altLang="en-US" smtClean="0"/>
-              <a:t>2025/1/6</a:t>
+              <a:t>2025/2/7</a:t>
             </a:fld>
             <a:endParaRPr kumimoji="1" lang="ja-JP" altLang="en-US"/>
           </a:p>
@@ -4404,7 +4404,7 @@
         <p:spPr>
           <a:xfrm>
             <a:off x="567542" y="1216429"/>
-            <a:ext cx="9174306" cy="1200329"/>
+            <a:ext cx="9174306" cy="830997"/>
           </a:xfrm>
           <a:prstGeom prst="rect">
             <a:avLst/>
@@ -4478,14 +4478,11 @@
             </a:r>
             <a:r>
               <a:rPr kumimoji="1" lang="ja-JP" altLang="en-US" sz="2400" dirty="0"/>
-              <a:t>だけ選択されている状態にしましょう。</a:t>
-            </a:r>
-            <a:endParaRPr kumimoji="1" lang="en-US" altLang="ja-JP" sz="2400" dirty="0"/>
-          </a:p>
-          <a:p>
-            <a:r>
-              <a:rPr kumimoji="1" lang="ja-JP" altLang="en-US" sz="2400" dirty="0"/>
-              <a:t>（ほかの項目は不要なものになります）</a:t>
+              <a:t>だけ選択されている状態にしましょう</a:t>
+            </a:r>
+            <a:r>
+              <a:rPr lang="ja-JP" altLang="en-US" sz="2400" dirty="0"/>
+              <a:t>。</a:t>
             </a:r>
             <a:endParaRPr kumimoji="1" lang="en-US" altLang="ja-JP" sz="2400" dirty="0"/>
           </a:p>
